--- a/Documentaciones/RETO EQUIPO 4.pptx
+++ b/Documentaciones/RETO EQUIPO 4.pptx
@@ -4560,7 +4560,7 @@
                 <a:cs typeface="Courier Prime"/>
                 <a:sym typeface="Courier Prime"/>
               </a:rPr>
-              <a:t>2. Base de datos inteligente (Triggers) {</a:t>
+              <a:t>Base de datos inteligente (Triggers) {</a:t>
             </a:r>
           </a:p>
         </p:txBody>
@@ -4896,7 +4896,7 @@
                 <a:cs typeface="Courier Prime"/>
                 <a:sym typeface="Courier Prime"/>
               </a:rPr>
-              <a:t>3. Blindaje contra Errores Críticos {</a:t>
+              <a:t>Blindaje contra Errores Críticos {</a:t>
             </a:r>
           </a:p>
         </p:txBody>
@@ -10209,7 +10209,7 @@
         </p:nvSpPr>
         <p:spPr>
           <a:xfrm flipH="false" flipV="false" rot="0">
-            <a:off x="9547320" y="1857620"/>
+            <a:off x="9650275" y="1896550"/>
             <a:ext cx="8302028" cy="5884982"/>
           </a:xfrm>
           <a:custGeom>
@@ -11222,8 +11222,8 @@
         </p:nvSpPr>
         <p:spPr>
           <a:xfrm flipH="false" flipV="false" rot="0">
-            <a:off x="9547320" y="1857620"/>
-            <a:ext cx="8302028" cy="5884982"/>
+            <a:off x="9745983" y="1896550"/>
+            <a:ext cx="8110612" cy="5941023"/>
           </a:xfrm>
           <a:custGeom>
             <a:avLst/>
@@ -11232,18 +11232,18 @@
             <a:cxnLst/>
             <a:rect r="r" b="b" t="t" l="l"/>
             <a:pathLst>
-              <a:path h="5884982" w="8302028">
+              <a:path h="5941023" w="8110612">
                 <a:moveTo>
                   <a:pt x="0" y="0"/>
                 </a:moveTo>
                 <a:lnTo>
-                  <a:pt x="8302028" y="0"/>
+                  <a:pt x="8110612" y="0"/>
                 </a:lnTo>
                 <a:lnTo>
-                  <a:pt x="8302028" y="5884982"/>
+                  <a:pt x="8110612" y="5941023"/>
                 </a:lnTo>
                 <a:lnTo>
-                  <a:pt x="0" y="5884982"/>
+                  <a:pt x="0" y="5941023"/>
                 </a:lnTo>
                 <a:lnTo>
                   <a:pt x="0" y="0"/>
@@ -17246,7 +17246,7 @@
                 <a:cs typeface="Courier Prime"/>
                 <a:sym typeface="Courier Prime"/>
               </a:rPr>
-              <a:t>1. Un diseño pensado en la agilidad del día a día {</a:t>
+              <a:t>Un diseño pensado en la agilidad del día a día {</a:t>
             </a:r>
           </a:p>
         </p:txBody>

--- a/Documentaciones/RETO EQUIPO 4.pptx
+++ b/Documentaciones/RETO EQUIPO 4.pptx
@@ -5111,7 +5111,7 @@
                 <a:cs typeface="Courier Prime"/>
                 <a:sym typeface="Courier Prime"/>
               </a:rPr>
-              <a:t>La aplicación se ha llevado a cabo en Java Swing utilizando el ED Netbeans.</a:t>
+              <a:t>La aplicación se ha llevado a cabo en Java Swing utilizando el IDE Netbeans.</a:t>
             </a:r>
           </a:p>
           <a:p>

--- a/Documentaciones/RETO EQUIPO 4.pptx
+++ b/Documentaciones/RETO EQUIPO 4.pptx
@@ -4570,6 +4570,9 @@
   <p:clrMapOvr>
     <a:masterClrMapping/>
   </p:clrMapOvr>
+  <p:transition spd="slow">
+    <p:push dir="l"/>
+  </p:transition>
 </p:sld>
 </file>
 
@@ -4906,6 +4909,9 @@
   <p:clrMapOvr>
     <a:masterClrMapping/>
   </p:clrMapOvr>
+  <p:transition spd="slow">
+    <p:push dir="l"/>
+  </p:transition>
 </p:sld>
 </file>
 
@@ -5229,6 +5235,9 @@
   <p:clrMapOvr>
     <a:masterClrMapping/>
   </p:clrMapOvr>
+  <p:transition spd="slow">
+    <p:push dir="l"/>
+  </p:transition>
 </p:sld>
 </file>
 
@@ -5705,6 +5714,9 @@
   <p:clrMapOvr>
     <a:masterClrMapping/>
   </p:clrMapOvr>
+  <p:transition spd="slow">
+    <p:push dir="l"/>
+  </p:transition>
 </p:sld>
 </file>
 
@@ -5851,9 +5863,9 @@
         <p:grpSpPr>
           <a:xfrm rot="0">
             <a:off x="14050838" y="3070372"/>
-            <a:ext cx="3208462" cy="4540954"/>
+            <a:ext cx="3208462" cy="4794322"/>
             <a:chOff x="0" y="0"/>
-            <a:chExt cx="1330715" cy="1883368"/>
+            <a:chExt cx="1330715" cy="1988452"/>
           </a:xfrm>
         </p:grpSpPr>
         <p:sp>
@@ -5865,7 +5877,7 @@
           <p:spPr>
             <a:xfrm flipH="false" flipV="false" rot="0">
               <a:off x="0" y="0"/>
-              <a:ext cx="1330715" cy="1883368"/>
+              <a:ext cx="1330715" cy="1988452"/>
             </a:xfrm>
             <a:custGeom>
               <a:avLst/>
@@ -5874,7 +5886,7 @@
               <a:cxnLst/>
               <a:rect r="r" b="b" t="t" l="l"/>
               <a:pathLst>
-                <a:path h="1883368" w="1330715">
+                <a:path h="1988452" w="1330715">
                   <a:moveTo>
                     <a:pt x="0" y="0"/>
                   </a:moveTo>
@@ -5882,10 +5894,10 @@
                     <a:pt x="1330715" y="0"/>
                   </a:lnTo>
                   <a:lnTo>
-                    <a:pt x="1330715" y="1883368"/>
+                    <a:pt x="1330715" y="1988452"/>
                   </a:lnTo>
                   <a:lnTo>
-                    <a:pt x="0" y="1883368"/>
+                    <a:pt x="0" y="1988452"/>
                   </a:lnTo>
                   <a:close/>
                 </a:path>
@@ -6098,7 +6110,7 @@
         <p:spPr>
           <a:xfrm rot="0">
             <a:off x="7844843" y="4022941"/>
-            <a:ext cx="2598314" cy="3864610"/>
+            <a:ext cx="2598314" cy="3588385"/>
           </a:xfrm>
           <a:prstGeom prst="rect">
             <a:avLst/>
@@ -6125,7 +6137,7 @@
                 <a:cs typeface="Courier Prime"/>
                 <a:sym typeface="Courier Prime"/>
               </a:rPr>
-              <a:t>Se programan las ventanas y componentes gráficos con Java Swing (botones, tablas, formularios, menús, etc.). También se implementa la lógica de negocio, validaciones y manejo de eventos para que la aplicación funcione correctamente.</a:t>
+              <a:t>Se programan las ventanas y componentes gráficos con Java Swing (botones, tablas, formularios, menús, etc.). También se implementa la lógica, validaciones y manejo de eventos para que la aplicación funcione correctamente.</a:t>
             </a:r>
           </a:p>
         </p:txBody>
@@ -6858,6 +6870,9 @@
   <p:clrMapOvr>
     <a:masterClrMapping/>
   </p:clrMapOvr>
+  <p:transition spd="slow">
+    <p:push dir="l"/>
+  </p:transition>
 </p:sld>
 </file>
 
@@ -7426,6 +7441,9 @@
   <p:clrMapOvr>
     <a:masterClrMapping/>
   </p:clrMapOvr>
+  <p:transition spd="slow">
+    <p:push dir="l"/>
+  </p:transition>
 </p:sld>
 </file>
 
@@ -8408,6 +8426,9 @@
   <p:clrMapOvr>
     <a:masterClrMapping/>
   </p:clrMapOvr>
+  <p:transition spd="slow">
+    <p:push dir="l"/>
+  </p:transition>
 </p:sld>
 </file>
 
@@ -9121,6 +9142,9 @@
   <p:clrMapOvr>
     <a:masterClrMapping/>
   </p:clrMapOvr>
+  <p:transition spd="slow">
+    <p:push dir="l"/>
+  </p:transition>
 </p:sld>
 </file>
 
@@ -10064,6 +10088,9 @@
   <p:clrMapOvr>
     <a:masterClrMapping/>
   </p:clrMapOvr>
+  <p:transition spd="slow">
+    <p:push dir="l"/>
+  </p:transition>
 </p:sld>
 </file>
 
@@ -10639,6 +10666,9 @@
   <p:clrMapOvr>
     <a:masterClrMapping/>
   </p:clrMapOvr>
+  <p:transition spd="slow">
+    <p:push dir="l"/>
+  </p:transition>
 </p:sld>
 </file>
 
@@ -11077,6 +11107,9 @@
   <p:clrMapOvr>
     <a:masterClrMapping/>
   </p:clrMapOvr>
+  <p:transition spd="slow">
+    <p:push dir="l"/>
+  </p:transition>
 </p:sld>
 </file>
 
@@ -11350,8 +11383,8 @@
         </p:nvSpPr>
         <p:spPr>
           <a:xfrm rot="0">
-            <a:off x="1442885" y="2225150"/>
-            <a:ext cx="6988679" cy="1637157"/>
+            <a:off x="1442885" y="2390173"/>
+            <a:ext cx="6988679" cy="1227582"/>
           </a:xfrm>
           <a:prstGeom prst="rect">
             <a:avLst/>
@@ -11420,16 +11453,36 @@
                 <a:cs typeface="Courier Prime"/>
                 <a:sym typeface="Courier Prime"/>
               </a:rPr>
-              <a:t>MeshStandardMaterial</a:t>
-            </a:r>
-          </a:p>
-          <a:p>
-            <a:pPr algn="l" marL="518160" indent="-259080" lvl="1">
+              <a:t>userData</a:t>
+            </a:r>
+          </a:p>
+        </p:txBody>
+      </p:sp>
+      <p:sp>
+        <p:nvSpPr>
+          <p:cNvPr name="TextBox 10" id="10"/>
+          <p:cNvSpPr txBox="true"/>
+          <p:nvPr/>
+        </p:nvSpPr>
+        <p:spPr>
+          <a:xfrm rot="0">
+            <a:off x="1442885" y="4377248"/>
+            <a:ext cx="6988679" cy="2046732"/>
+          </a:xfrm>
+          <a:prstGeom prst="rect">
+            <a:avLst/>
+          </a:prstGeom>
+        </p:spPr>
+        <p:txBody>
+          <a:bodyPr anchor="t" rtlCol="false" tIns="0" lIns="0" bIns="0" rIns="0">
+            <a:spAutoFit/>
+          </a:bodyPr>
+          <a:lstStyle/>
+          <a:p>
+            <a:pPr algn="just">
               <a:lnSpc>
                 <a:spcPts val="3264"/>
               </a:lnSpc>
-              <a:buFont typeface="Arial"/>
-              <a:buChar char="•"/>
             </a:pPr>
             <a:r>
               <a:rPr lang="en-US" sz="2400">
@@ -11441,21 +11494,91 @@
                 <a:cs typeface="Courier Prime"/>
                 <a:sym typeface="Courier Prime"/>
               </a:rPr>
-              <a:t>userData</a:t>
-            </a:r>
-          </a:p>
-        </p:txBody>
-      </p:sp>
-      <p:sp>
-        <p:nvSpPr>
-          <p:cNvPr name="TextBox 10" id="10"/>
+              <a:t>Funcionalidades principales:</a:t>
+            </a:r>
+          </a:p>
+          <a:p>
+            <a:pPr algn="l" marL="518160" indent="-259080" lvl="1">
+              <a:lnSpc>
+                <a:spcPts val="3264"/>
+              </a:lnSpc>
+              <a:buFont typeface="Arial"/>
+              <a:buChar char="•"/>
+            </a:pPr>
+            <a:r>
+              <a:rPr lang="en-US" sz="2400">
+                <a:solidFill>
+                  <a:srgbClr val="FFFFFF"/>
+                </a:solidFill>
+                <a:latin typeface="Courier Prime"/>
+                <a:ea typeface="Courier Prime"/>
+                <a:cs typeface="Courier Prime"/>
+                <a:sym typeface="Courier Prime"/>
+              </a:rPr>
+              <a:t>Seleccion individual</a:t>
+            </a:r>
+          </a:p>
+          <a:p>
+            <a:pPr algn="l" marL="518160" indent="-259080" lvl="1">
+              <a:lnSpc>
+                <a:spcPts val="3264"/>
+              </a:lnSpc>
+              <a:buFont typeface="Arial"/>
+              <a:buChar char="•"/>
+            </a:pPr>
+            <a:r>
+              <a:rPr lang="en-US" sz="2400">
+                <a:solidFill>
+                  <a:srgbClr val="FFFFFF"/>
+                </a:solidFill>
+                <a:latin typeface="Courier Prime"/>
+                <a:ea typeface="Courier Prime"/>
+                <a:cs typeface="Courier Prime"/>
+                <a:sym typeface="Courier Prime"/>
+              </a:rPr>
+              <a:t>Conexion con la BD</a:t>
+            </a:r>
+          </a:p>
+          <a:p>
+            <a:pPr algn="l" marL="518160" indent="-259080" lvl="1">
+              <a:lnSpc>
+                <a:spcPts val="3264"/>
+              </a:lnSpc>
+              <a:buFont typeface="Arial"/>
+              <a:buChar char="•"/>
+            </a:pPr>
+            <a:r>
+              <a:rPr lang="en-US" sz="2400">
+                <a:solidFill>
+                  <a:srgbClr val="FFFFFF"/>
+                </a:solidFill>
+                <a:latin typeface="Courier Prime"/>
+                <a:ea typeface="Courier Prime"/>
+                <a:cs typeface="Courier Prime"/>
+                <a:sym typeface="Courier Prime"/>
+              </a:rPr>
+              <a:t>Panel Informativo Integrado</a:t>
+            </a:r>
+          </a:p>
+          <a:p>
+            <a:pPr algn="just">
+              <a:lnSpc>
+                <a:spcPts val="3264"/>
+              </a:lnSpc>
+            </a:pPr>
+          </a:p>
+        </p:txBody>
+      </p:sp>
+      <p:sp>
+        <p:nvSpPr>
+          <p:cNvPr name="TextBox 11" id="11"/>
           <p:cNvSpPr txBox="true"/>
           <p:nvPr/>
         </p:nvSpPr>
         <p:spPr>
           <a:xfrm rot="0">
-            <a:off x="1442885" y="4377248"/>
-            <a:ext cx="6988679" cy="2046732"/>
+            <a:off x="1442885" y="6609588"/>
+            <a:ext cx="6988679" cy="1637157"/>
           </a:xfrm>
           <a:prstGeom prst="rect">
             <a:avLst/>
@@ -11482,7 +11605,7 @@
                 <a:cs typeface="Courier Prime"/>
                 <a:sym typeface="Courier Prime"/>
               </a:rPr>
-              <a:t>Funcionalidades principales:</a:t>
+              <a:t>Control y Cámara:</a:t>
             </a:r>
           </a:p>
           <a:p>
@@ -11503,8 +11626,17 @@
                 <a:cs typeface="Courier Prime"/>
                 <a:sym typeface="Courier Prime"/>
               </a:rPr>
-              <a:t>Efect</a:t>
-            </a:r>
+              <a:t>Rotación</a:t>
+            </a:r>
+          </a:p>
+          <a:p>
+            <a:pPr algn="l" marL="518160" indent="-259080" lvl="1">
+              <a:lnSpc>
+                <a:spcPts val="3264"/>
+              </a:lnSpc>
+              <a:buFont typeface="Arial"/>
+              <a:buChar char="•"/>
+            </a:pPr>
             <a:r>
               <a:rPr lang="en-US" sz="2400">
                 <a:solidFill>
@@ -11515,160 +11647,7 @@
                 <a:cs typeface="Courier Prime"/>
                 <a:sym typeface="Courier Prime"/>
               </a:rPr>
-              <a:t>o Focus con Opacidad Dinámica</a:t>
-            </a:r>
-          </a:p>
-          <a:p>
-            <a:pPr algn="l" marL="518160" indent="-259080" lvl="1">
-              <a:lnSpc>
-                <a:spcPts val="3264"/>
-              </a:lnSpc>
-              <a:buFont typeface="Arial"/>
-              <a:buChar char="•"/>
-            </a:pPr>
-            <a:r>
-              <a:rPr lang="en-US" sz="2400">
-                <a:solidFill>
-                  <a:srgbClr val="FFFFFF"/>
-                </a:solidFill>
-                <a:latin typeface="Courier Prime"/>
-                <a:ea typeface="Courier Prime"/>
-                <a:cs typeface="Courier Prime"/>
-                <a:sym typeface="Courier Prime"/>
-              </a:rPr>
-              <a:t>Consumo de API Dinámica</a:t>
-            </a:r>
-          </a:p>
-          <a:p>
-            <a:pPr algn="l" marL="518160" indent="-259080" lvl="1">
-              <a:lnSpc>
-                <a:spcPts val="3264"/>
-              </a:lnSpc>
-              <a:buFont typeface="Arial"/>
-              <a:buChar char="•"/>
-            </a:pPr>
-            <a:r>
-              <a:rPr lang="en-US" sz="2400">
-                <a:solidFill>
-                  <a:srgbClr val="FFFFFF"/>
-                </a:solidFill>
-                <a:latin typeface="Courier Prime"/>
-                <a:ea typeface="Courier Prime"/>
-                <a:cs typeface="Courier Prime"/>
-                <a:sym typeface="Courier Prime"/>
-              </a:rPr>
-              <a:t>Panel Informativo Integrado</a:t>
-            </a:r>
-          </a:p>
-          <a:p>
-            <a:pPr algn="just">
-              <a:lnSpc>
-                <a:spcPts val="3264"/>
-              </a:lnSpc>
-            </a:pPr>
-          </a:p>
-        </p:txBody>
-      </p:sp>
-      <p:sp>
-        <p:nvSpPr>
-          <p:cNvPr name="TextBox 11" id="11"/>
-          <p:cNvSpPr txBox="true"/>
-          <p:nvPr/>
-        </p:nvSpPr>
-        <p:spPr>
-          <a:xfrm rot="0">
-            <a:off x="1442885" y="6609588"/>
-            <a:ext cx="6988679" cy="2046732"/>
-          </a:xfrm>
-          <a:prstGeom prst="rect">
-            <a:avLst/>
-          </a:prstGeom>
-        </p:spPr>
-        <p:txBody>
-          <a:bodyPr anchor="t" rtlCol="false" tIns="0" lIns="0" bIns="0" rIns="0">
-            <a:spAutoFit/>
-          </a:bodyPr>
-          <a:lstStyle/>
-          <a:p>
-            <a:pPr algn="just">
-              <a:lnSpc>
-                <a:spcPts val="3264"/>
-              </a:lnSpc>
-            </a:pPr>
-            <a:r>
-              <a:rPr lang="en-US" sz="2400">
-                <a:solidFill>
-                  <a:srgbClr val="FFFFFF"/>
-                </a:solidFill>
-                <a:latin typeface="Courier Prime"/>
-                <a:ea typeface="Courier Prime"/>
-                <a:cs typeface="Courier Prime"/>
-                <a:sym typeface="Courier Prime"/>
-              </a:rPr>
-              <a:t>Control y Cámara:</a:t>
-            </a:r>
-          </a:p>
-          <a:p>
-            <a:pPr algn="l" marL="518160" indent="-259080" lvl="1">
-              <a:lnSpc>
-                <a:spcPts val="3264"/>
-              </a:lnSpc>
-              <a:buFont typeface="Arial"/>
-              <a:buChar char="•"/>
-            </a:pPr>
-            <a:r>
-              <a:rPr lang="en-US" sz="2400">
-                <a:solidFill>
-                  <a:srgbClr val="FFFFFF"/>
-                </a:solidFill>
-                <a:latin typeface="Courier Prime"/>
-                <a:ea typeface="Courier Prime"/>
-                <a:cs typeface="Courier Prime"/>
-                <a:sym typeface="Courier Prime"/>
-              </a:rPr>
-              <a:t>Restricción de Rotación</a:t>
-            </a:r>
-          </a:p>
-          <a:p>
-            <a:pPr algn="l" marL="518160" indent="-259080" lvl="1">
-              <a:lnSpc>
-                <a:spcPts val="3264"/>
-              </a:lnSpc>
-              <a:buFont typeface="Arial"/>
-              <a:buChar char="•"/>
-            </a:pPr>
-            <a:r>
-              <a:rPr lang="en-US" sz="2400">
-                <a:solidFill>
-                  <a:srgbClr val="FFFFFF"/>
-                </a:solidFill>
-                <a:latin typeface="Courier Prime"/>
-                <a:ea typeface="Courier Prime"/>
-                <a:cs typeface="Courier Prime"/>
-                <a:sym typeface="Courier Prime"/>
-              </a:rPr>
-              <a:t>Zoom Inteligente</a:t>
-            </a:r>
-          </a:p>
-          <a:p>
-            <a:pPr algn="l" marL="518160" indent="-259080" lvl="1">
-              <a:lnSpc>
-                <a:spcPts val="3264"/>
-              </a:lnSpc>
-              <a:buFont typeface="Arial"/>
-              <a:buChar char="•"/>
-            </a:pPr>
-            <a:r>
-              <a:rPr lang="en-US" sz="2400">
-                <a:solidFill>
-                  <a:srgbClr val="FFFFFF"/>
-                </a:solidFill>
-                <a:latin typeface="Courier Prime"/>
-                <a:ea typeface="Courier Prime"/>
-                <a:cs typeface="Courier Prime"/>
-                <a:sym typeface="Courier Prime"/>
-              </a:rPr>
-              <a:t>Botón Vista Cenital</a:t>
+              <a:t>Limitacion de rotacion</a:t>
             </a:r>
           </a:p>
           <a:p>
@@ -11685,6 +11664,9 @@
   <p:clrMapOvr>
     <a:masterClrMapping/>
   </p:clrMapOvr>
+  <p:transition spd="slow">
+    <p:push dir="l"/>
+  </p:transition>
 </p:sld>
 </file>
 
@@ -11924,6 +11906,9 @@
   <p:clrMapOvr>
     <a:masterClrMapping/>
   </p:clrMapOvr>
+  <p:transition spd="slow">
+    <p:push dir="l"/>
+  </p:transition>
 </p:sld>
 </file>
 
@@ -12588,6 +12573,9 @@
   <p:clrMapOvr>
     <a:masterClrMapping/>
   </p:clrMapOvr>
+  <p:transition spd="slow">
+    <p:push dir="l"/>
+  </p:transition>
 </p:sld>
 </file>
 
@@ -13788,6 +13776,9 @@
   <p:clrMapOvr>
     <a:masterClrMapping/>
   </p:clrMapOvr>
+  <p:transition spd="slow">
+    <p:push dir="l"/>
+  </p:transition>
 </p:sld>
 </file>
 
@@ -14565,6 +14556,9 @@
   <p:clrMapOvr>
     <a:masterClrMapping/>
   </p:clrMapOvr>
+  <p:transition spd="slow">
+    <p:push dir="l"/>
+  </p:transition>
 </p:sld>
 </file>
 
@@ -15004,6 +14998,9 @@
   <p:clrMapOvr>
     <a:masterClrMapping/>
   </p:clrMapOvr>
+  <p:transition spd="slow">
+    <p:push dir="l"/>
+  </p:transition>
 </p:sld>
 </file>
 
@@ -15946,6 +15943,9 @@
   <p:clrMapOvr>
     <a:masterClrMapping/>
   </p:clrMapOvr>
+  <p:transition spd="slow">
+    <p:push dir="l"/>
+  </p:transition>
 </p:sld>
 </file>
 
@@ -16427,6 +16427,9 @@
   <p:clrMapOvr>
     <a:masterClrMapping/>
   </p:clrMapOvr>
+  <p:transition spd="slow">
+    <p:push dir="l"/>
+  </p:transition>
 </p:sld>
 </file>
 
@@ -17256,6 +17259,9 @@
   <p:clrMapOvr>
     <a:masterClrMapping/>
   </p:clrMapOvr>
+  <p:transition spd="slow">
+    <p:push dir="l"/>
+  </p:transition>
 </p:sld>
 </file>
 
